--- a/artifacts/speaking-portfolio-expanded/decks/retrieval-30min-screen.pptx
+++ b/artifacts/speaking-portfolio-expanded/decks/retrieval-30min-screen.pptx
@@ -106,7 +106,7 @@
                 <a:ea typeface="Arial"/>
                 <a:cs typeface="Arial"/>
               </a:rPr>
-              <a:t xml:space="preserve">Your Eval Suite Has a Grandfather</a:t>
+              <a:t xml:space="preserve">Three Search Methods in a Fundable Trenchcoat</a:t>
             </a:r>
             <a:endParaRPr lang="en-US" sz="1200"/>
           </a:p>
@@ -587,7 +587,7 @@
                 <a:ea typeface="Arial"/>
                 <a:cs typeface="Arial"/>
               </a:rPr>
-              <a:t xml:space="preserve">Your Eval Suite Has a Grandfather</a:t>
+              <a:t xml:space="preserve">Three Search Methods in a Fundable Trenchcoat</a:t>
             </a:r>
             <a:endParaRPr lang="en-US" sz="1200"/>
           </a:p>
@@ -1206,7 +1206,7 @@
                 <a:ea typeface="Arial"/>
                 <a:cs typeface="Arial"/>
               </a:rPr>
-              <a:t xml:space="preserve">Your Eval Suite Has a Grandfather</a:t>
+              <a:t xml:space="preserve">Three Search Methods in a Fundable Trenchcoat</a:t>
             </a:r>
             <a:endParaRPr lang="en-US" sz="1200"/>
           </a:p>
@@ -1733,7 +1733,7 @@
                 <a:ea typeface="Arial"/>
                 <a:cs typeface="Arial"/>
               </a:rPr>
-              <a:t xml:space="preserve">Your Eval Suite Has a Grandfather</a:t>
+              <a:t xml:space="preserve">Three Search Methods in a Fundable Trenchcoat</a:t>
             </a:r>
             <a:endParaRPr lang="en-US" sz="1200"/>
           </a:p>
@@ -2214,7 +2214,7 @@
                 <a:ea typeface="Arial"/>
                 <a:cs typeface="Arial"/>
               </a:rPr>
-              <a:t xml:space="preserve">Your Eval Suite Has a Grandfather</a:t>
+              <a:t xml:space="preserve">Three Search Methods in a Fundable Trenchcoat</a:t>
             </a:r>
             <a:endParaRPr lang="en-US" sz="1200"/>
           </a:p>
@@ -2695,7 +2695,7 @@
                 <a:ea typeface="Arial"/>
                 <a:cs typeface="Arial"/>
               </a:rPr>
-              <a:t xml:space="preserve">Your Eval Suite Has a Grandfather</a:t>
+              <a:t xml:space="preserve">Three Search Methods in a Fundable Trenchcoat</a:t>
             </a:r>
             <a:endParaRPr lang="en-US" sz="1200"/>
           </a:p>
@@ -2787,7 +2787,7 @@
                 <a:ea typeface="Arial"/>
                 <a:cs typeface="Arial"/>
               </a:rPr>
-              <a:t xml:space="preserve">Your eval suite has a grandfather.</a:t>
+              <a:t xml:space="preserve">Three search methods in a fundable trenchcoat.</a:t>
             </a:r>
             <a:endParaRPr lang="en-US" sz="1200"/>
           </a:p>
@@ -3176,7 +3176,7 @@
                 <a:ea typeface="Arial"/>
                 <a:cs typeface="Arial"/>
               </a:rPr>
-              <a:t xml:space="preserve">Your Eval Suite Has a Grandfather</a:t>
+              <a:t xml:space="preserve">Three Search Methods in a Fundable Trenchcoat</a:t>
             </a:r>
             <a:endParaRPr lang="en-US" sz="1200"/>
           </a:p>
@@ -3657,7 +3657,7 @@
                 <a:ea typeface="Arial"/>
                 <a:cs typeface="Arial"/>
               </a:rPr>
-              <a:t xml:space="preserve">Your Eval Suite Has a Grandfather</a:t>
+              <a:t xml:space="preserve">Three Search Methods in a Fundable Trenchcoat</a:t>
             </a:r>
             <a:endParaRPr lang="en-US" sz="1200"/>
           </a:p>
@@ -4184,7 +4184,7 @@
                 <a:ea typeface="Arial"/>
                 <a:cs typeface="Arial"/>
               </a:rPr>
-              <a:t xml:space="preserve">Your Eval Suite Has a Grandfather</a:t>
+              <a:t xml:space="preserve">Three Search Methods in a Fundable Trenchcoat</a:t>
             </a:r>
             <a:endParaRPr lang="en-US" sz="1200"/>
           </a:p>
@@ -4711,7 +4711,7 @@
                 <a:ea typeface="Arial"/>
                 <a:cs typeface="Arial"/>
               </a:rPr>
-              <a:t xml:space="preserve">Your Eval Suite Has a Grandfather</a:t>
+              <a:t xml:space="preserve">Three Search Methods in a Fundable Trenchcoat</a:t>
             </a:r>
             <a:endParaRPr lang="en-US" sz="1200"/>
           </a:p>
@@ -5238,7 +5238,7 @@
                 <a:ea typeface="Arial"/>
                 <a:cs typeface="Arial"/>
               </a:rPr>
-              <a:t xml:space="preserve">Your Eval Suite Has a Grandfather</a:t>
+              <a:t xml:space="preserve">Three Search Methods in a Fundable Trenchcoat</a:t>
             </a:r>
             <a:endParaRPr lang="en-US" sz="1200"/>
           </a:p>
@@ -5765,7 +5765,7 @@
                 <a:ea typeface="Arial"/>
                 <a:cs typeface="Arial"/>
               </a:rPr>
-              <a:t xml:space="preserve">Your Eval Suite Has a Grandfather</a:t>
+              <a:t xml:space="preserve">Three Search Methods in a Fundable Trenchcoat</a:t>
             </a:r>
             <a:endParaRPr lang="en-US" sz="1200"/>
           </a:p>
@@ -6292,7 +6292,7 @@
                 <a:ea typeface="Arial"/>
                 <a:cs typeface="Arial"/>
               </a:rPr>
-              <a:t xml:space="preserve">Your Eval Suite Has a Grandfather</a:t>
+              <a:t xml:space="preserve">Three Search Methods in a Fundable Trenchcoat</a:t>
             </a:r>
             <a:endParaRPr lang="en-US" sz="1200"/>
           </a:p>
@@ -6911,7 +6911,7 @@
                 <a:ea typeface="Arial"/>
                 <a:cs typeface="Arial"/>
               </a:rPr>
-              <a:t xml:space="preserve">Your Eval Suite Has a Grandfather</a:t>
+              <a:t xml:space="preserve">Three Search Methods in a Fundable Trenchcoat</a:t>
             </a:r>
             <a:endParaRPr lang="en-US" sz="1200"/>
           </a:p>
@@ -7509,7 +7509,7 @@
                 <a:ea typeface="Arial"/>
                 <a:cs typeface="Arial"/>
               </a:rPr>
-              <a:t xml:space="preserve">Your Eval Suite Has a Grandfather · Dan Levy</a:t>
+              <a:t xml:space="preserve">Three Search Methods in a Fundable Trenchcoat · Dan Levy</a:t>
             </a:r>
             <a:endParaRPr lang="en-US" sz="1350"/>
           </a:p>
@@ -7803,7 +7803,7 @@
                 <a:ea typeface="Arial"/>
                 <a:cs typeface="Arial"/>
               </a:rPr>
-              <a:t xml:space="preserve">Your Eval Suite Has a Grandfather</a:t>
+              <a:t xml:space="preserve">Three Search Methods in a Fundable Trenchcoat</a:t>
             </a:r>
             <a:endParaRPr lang="en-US" sz="975"/>
           </a:p>
@@ -8326,7 +8326,7 @@
                 <a:ea typeface="Arial"/>
                 <a:cs typeface="Arial"/>
               </a:rPr>
-              <a:t xml:space="preserve">Your Eval Suite Has a Grandfather</a:t>
+              <a:t xml:space="preserve">Three Search Methods in a Fundable Trenchcoat</a:t>
             </a:r>
             <a:endParaRPr lang="en-US" sz="975"/>
           </a:p>
@@ -8774,7 +8774,7 @@
                 <a:ea typeface="Arial"/>
                 <a:cs typeface="Arial"/>
               </a:rPr>
-              <a:t xml:space="preserve">Your Eval Suite Has a Grandfather</a:t>
+              <a:t xml:space="preserve">Three Search Methods in a Fundable Trenchcoat</a:t>
             </a:r>
             <a:endParaRPr lang="en-US" sz="975"/>
           </a:p>
@@ -9199,7 +9199,7 @@
                 <a:ea typeface="Arial"/>
                 <a:cs typeface="Arial"/>
               </a:rPr>
-              <a:t xml:space="preserve">Your Eval Suite Has a Grandfather</a:t>
+              <a:t xml:space="preserve">Three Search Methods in a Fundable Trenchcoat</a:t>
             </a:r>
             <a:endParaRPr lang="en-US" sz="975"/>
           </a:p>
@@ -9624,7 +9624,7 @@
                 <a:ea typeface="Arial"/>
                 <a:cs typeface="Arial"/>
               </a:rPr>
-              <a:t xml:space="preserve">Your Eval Suite Has a Grandfather</a:t>
+              <a:t xml:space="preserve">Three Search Methods in a Fundable Trenchcoat</a:t>
             </a:r>
             <a:endParaRPr lang="en-US" sz="975"/>
           </a:p>
@@ -9902,7 +9902,7 @@
                 <a:ea typeface="Arial"/>
                 <a:cs typeface="Arial"/>
               </a:rPr>
-              <a:t xml:space="preserve">Your eval suite has a grandfather.</a:t>
+              <a:t xml:space="preserve">Three search methods in a fundable trenchcoat.</a:t>
             </a:r>
             <a:endParaRPr lang="en-US" sz="3150"/>
           </a:p>
@@ -10049,7 +10049,7 @@
                 <a:ea typeface="Arial"/>
                 <a:cs typeface="Arial"/>
               </a:rPr>
-              <a:t xml:space="preserve">Your Eval Suite Has a Grandfather</a:t>
+              <a:t xml:space="preserve">Three Search Methods in a Fundable Trenchcoat</a:t>
             </a:r>
             <a:endParaRPr lang="en-US" sz="975"/>
           </a:p>
@@ -10474,7 +10474,7 @@
                 <a:ea typeface="Arial"/>
                 <a:cs typeface="Arial"/>
               </a:rPr>
-              <a:t xml:space="preserve">Your Eval Suite Has a Grandfather</a:t>
+              <a:t xml:space="preserve">Three Search Methods in a Fundable Trenchcoat</a:t>
             </a:r>
             <a:endParaRPr lang="en-US" sz="975"/>
           </a:p>
@@ -10899,7 +10899,7 @@
                 <a:ea typeface="Arial"/>
                 <a:cs typeface="Arial"/>
               </a:rPr>
-              <a:t xml:space="preserve">Your Eval Suite Has a Grandfather</a:t>
+              <a:t xml:space="preserve">Three Search Methods in a Fundable Trenchcoat</a:t>
             </a:r>
             <a:endParaRPr lang="en-US" sz="975"/>
           </a:p>
@@ -11347,7 +11347,7 @@
                 <a:ea typeface="Arial"/>
                 <a:cs typeface="Arial"/>
               </a:rPr>
-              <a:t xml:space="preserve">Your Eval Suite Has a Grandfather</a:t>
+              <a:t xml:space="preserve">Three Search Methods in a Fundable Trenchcoat</a:t>
             </a:r>
             <a:endParaRPr lang="en-US" sz="975"/>
           </a:p>
@@ -11772,7 +11772,7 @@
                 <a:ea typeface="Arial"/>
                 <a:cs typeface="Arial"/>
               </a:rPr>
-              <a:t xml:space="preserve">Your Eval Suite Has a Grandfather</a:t>
+              <a:t xml:space="preserve">Three Search Methods in a Fundable Trenchcoat</a:t>
             </a:r>
             <a:endParaRPr lang="en-US" sz="975"/>
           </a:p>
@@ -12197,7 +12197,7 @@
                 <a:ea typeface="Arial"/>
                 <a:cs typeface="Arial"/>
               </a:rPr>
-              <a:t xml:space="preserve">Your Eval Suite Has a Grandfather</a:t>
+              <a:t xml:space="preserve">Three Search Methods in a Fundable Trenchcoat</a:t>
             </a:r>
             <a:endParaRPr lang="en-US" sz="975"/>
           </a:p>
@@ -12622,7 +12622,7 @@
                 <a:ea typeface="Arial"/>
                 <a:cs typeface="Arial"/>
               </a:rPr>
-              <a:t xml:space="preserve">Your Eval Suite Has a Grandfather</a:t>
+              <a:t xml:space="preserve">Three Search Methods in a Fundable Trenchcoat</a:t>
             </a:r>
             <a:endParaRPr lang="en-US" sz="975"/>
           </a:p>
@@ -13341,7 +13341,7 @@
                 <a:ea typeface="Arial"/>
                 <a:cs typeface="Arial"/>
               </a:rPr>
-              <a:t xml:space="preserve">Your Eval Suite Has a Grandfather</a:t>
+              <a:t xml:space="preserve">Three Search Methods in a Fundable Trenchcoat</a:t>
             </a:r>
             <a:endParaRPr lang="en-US" sz="975"/>
           </a:p>
@@ -13625,7 +13625,7 @@
                 <a:ea typeface="Arial"/>
                 <a:cs typeface="Arial"/>
               </a:rPr>
-              <a:t xml:space="preserve">Your Eval Suite Has a Grandfather</a:t>
+              <a:t xml:space="preserve">Three Search Methods in a Fundable Trenchcoat</a:t>
             </a:r>
             <a:endParaRPr lang="en-US" sz="975"/>
           </a:p>

--- a/artifacts/speaking-portfolio-expanded/decks/retrieval-30min-screen.pptx
+++ b/artifacts/speaking-portfolio-expanded/decks/retrieval-30min-screen.pptx
@@ -909,7 +909,7 @@
                 <a:ea typeface="Arial"/>
                 <a:cs typeface="Arial"/>
               </a:rPr>
-              <a:t xml:space="preserve">TREC used pooling because judging every document for every query was impractical. Zobel investigated reliability with incomplete judgments. The risk is real; universal failure is not. In a 2022 recheck, Voorhees, Soboroff, and Lin expanded TREC-8 judgments and found system-rank correlations above point nine nine. Deep, diverse pools had held up.</a:t>
+              <a:t xml:space="preserve">TREC used pooling because judging every document for every query was impractical. Zobel investigated reliability with incomplete judgments. The risk is real; universal failure is not. In a 2022 recheck, Voorhees, Soboroff, and Lin added judgments to TREC-8 and compared how the systems ranked before and after. The ordering barely moved. Deep, diverse pools had held up.</a:t>
             </a:r>
             <a:endParaRPr lang="en-US" sz="1200"/>
           </a:p>
@@ -2009,7 +2009,7 @@
                 <a:ea typeface="Arial"/>
                 <a:cs typeface="Arial"/>
               </a:rPr>
-              <a:t xml:space="preserve">Evaluate the handoff. Did retrieval find B and F? Did context assembly keep their relationship? Did the answer cite the actual exception? If the answer is wrong, those checks locate the failure instead of blaming the nearest model. IR also studied machine consumers before modern RAG; the change here is this particular generative handoff and its failure modes.</a:t>
+              <a:t xml:space="preserve">Evaluate the handoff. Did retrieval find B and F? Did context assembly keep their relationship? Did the answer cite the actual exception? If the answer is wrong, those checks locate the failure instead of blaming the nearest model.</a:t>
             </a:r>
             <a:endParaRPr lang="en-US" sz="1200"/>
           </a:p>
@@ -2787,7 +2787,7 @@
                 <a:ea typeface="Arial"/>
                 <a:cs typeface="Arial"/>
               </a:rPr>
-              <a:t xml:space="preserve">Three search methods in a fundable trenchcoat.</a:t>
+              <a:t xml:space="preserve">Three search methods. One instrument nobody checked.</a:t>
             </a:r>
             <a:endParaRPr lang="en-US" sz="1200"/>
           </a:p>
@@ -2971,99 +2971,99 @@
                 <a:ea typeface="Arial"/>
                 <a:cs typeface="Arial"/>
               </a:rPr>
-              <a:t xml:space="preserve">Sixty years since the Cranfield report. The field did not just build evaluations. It investigated when they could be trusted. Go find the documents your eval set never judged.</a:t>
-            </a:r>
-            <a:endParaRPr lang="en-US" sz="1200"/>
-          </a:p>
-          <a:p>
-            <a:pPr marL="0" indent="0">
-              <a:lnSpc>
-                <a:spcPts val="1560"/>
-              </a:lnSpc>
-              <a:spcAft>
-                <a:spcPts val="0"/>
-              </a:spcAft>
-              <a:buNone/>
-            </a:pPr>
-            <a:r>
-              <a:rPr lang="en-US" sz="1200" b="0">
-                <a:solidFill>
-                  <a:srgbClr val="202b33"/>
-                </a:solidFill>
-                <a:latin typeface="Arial"/>
-                <a:ea typeface="Arial"/>
-                <a:cs typeface="Arial"/>
-              </a:rPr>
-              <a:t xml:space="preserve"/>
-            </a:r>
-            <a:endParaRPr lang="en-US" sz="1200"/>
-          </a:p>
-          <a:p>
-            <a:pPr marL="0" indent="0">
-              <a:lnSpc>
-                <a:spcPts val="1560"/>
-              </a:lnSpc>
-              <a:spcAft>
-                <a:spcPts val="0"/>
-              </a:spcAft>
-              <a:buNone/>
-            </a:pPr>
-            <a:r>
-              <a:rPr lang="en-US" sz="1200" b="0">
-                <a:solidFill>
-                  <a:srgbClr val="202b33"/>
-                </a:solidFill>
-                <a:latin typeface="Arial"/>
-                <a:ea typeface="Arial"/>
-                <a:cs typeface="Arial"/>
-              </a:rPr>
-              <a:t xml:space="preserve"/>
-            </a:r>
-            <a:endParaRPr lang="en-US" sz="1200"/>
-          </a:p>
-          <a:p>
-            <a:pPr marL="0" indent="0">
-              <a:lnSpc>
-                <a:spcPts val="1560"/>
-              </a:lnSpc>
-              <a:spcAft>
-                <a:spcPts val="0"/>
-              </a:spcAft>
-              <a:buNone/>
-            </a:pPr>
-            <a:r>
-              <a:rPr lang="en-US" sz="1200" b="0">
-                <a:solidFill>
-                  <a:srgbClr val="202b33"/>
-                </a:solidFill>
-                <a:latin typeface="Arial"/>
-                <a:ea typeface="Arial"/>
-                <a:cs typeface="Arial"/>
-              </a:rPr>
-              <a:t xml:space="preserve"/>
-            </a:r>
-            <a:endParaRPr lang="en-US" sz="1200"/>
-          </a:p>
-          <a:p>
-            <a:pPr marL="0" indent="0">
-              <a:lnSpc>
-                <a:spcPts val="1560"/>
-              </a:lnSpc>
-              <a:spcAft>
-                <a:spcPts val="0"/>
-              </a:spcAft>
-              <a:buNone/>
-            </a:pPr>
-            <a:r>
-              <a:rPr lang="en-US" sz="1200" b="0">
-                <a:solidFill>
-                  <a:srgbClr val="202b33"/>
-                </a:solidFill>
-                <a:latin typeface="Arial"/>
-                <a:ea typeface="Arial"/>
-                <a:cs typeface="Arial"/>
-              </a:rPr>
-              <a:t xml:space="preserve">Leave the B/F example up during questions. Keep all eight terms in the notes; the screen closes on the instruction.</a:t>
+              <a:t xml:space="preserve">Three search methods in a fundable trenchcoat. That is a fair joke about the retriever, and the coat is not the problem. Lexical, dense, hybrid: we inherited all three. What we left behind was the sixty years of checking whether the score underneath was telling the truth. Go find the documents your eval set never judged.</a:t>
+            </a:r>
+            <a:endParaRPr lang="en-US" sz="1200"/>
+          </a:p>
+          <a:p>
+            <a:pPr marL="0" indent="0">
+              <a:lnSpc>
+                <a:spcPts val="1560"/>
+              </a:lnSpc>
+              <a:spcAft>
+                <a:spcPts val="0"/>
+              </a:spcAft>
+              <a:buNone/>
+            </a:pPr>
+            <a:r>
+              <a:rPr lang="en-US" sz="1200" b="0">
+                <a:solidFill>
+                  <a:srgbClr val="202b33"/>
+                </a:solidFill>
+                <a:latin typeface="Arial"/>
+                <a:ea typeface="Arial"/>
+                <a:cs typeface="Arial"/>
+              </a:rPr>
+              <a:t xml:space="preserve"/>
+            </a:r>
+            <a:endParaRPr lang="en-US" sz="1200"/>
+          </a:p>
+          <a:p>
+            <a:pPr marL="0" indent="0">
+              <a:lnSpc>
+                <a:spcPts val="1560"/>
+              </a:lnSpc>
+              <a:spcAft>
+                <a:spcPts val="0"/>
+              </a:spcAft>
+              <a:buNone/>
+            </a:pPr>
+            <a:r>
+              <a:rPr lang="en-US" sz="1200" b="0">
+                <a:solidFill>
+                  <a:srgbClr val="202b33"/>
+                </a:solidFill>
+                <a:latin typeface="Arial"/>
+                <a:ea typeface="Arial"/>
+                <a:cs typeface="Arial"/>
+              </a:rPr>
+              <a:t xml:space="preserve"/>
+            </a:r>
+            <a:endParaRPr lang="en-US" sz="1200"/>
+          </a:p>
+          <a:p>
+            <a:pPr marL="0" indent="0">
+              <a:lnSpc>
+                <a:spcPts val="1560"/>
+              </a:lnSpc>
+              <a:spcAft>
+                <a:spcPts val="0"/>
+              </a:spcAft>
+              <a:buNone/>
+            </a:pPr>
+            <a:r>
+              <a:rPr lang="en-US" sz="1200" b="0">
+                <a:solidFill>
+                  <a:srgbClr val="202b33"/>
+                </a:solidFill>
+                <a:latin typeface="Arial"/>
+                <a:ea typeface="Arial"/>
+                <a:cs typeface="Arial"/>
+              </a:rPr>
+              <a:t xml:space="preserve"/>
+            </a:r>
+            <a:endParaRPr lang="en-US" sz="1200"/>
+          </a:p>
+          <a:p>
+            <a:pPr marL="0" indent="0">
+              <a:lnSpc>
+                <a:spcPts val="1560"/>
+              </a:lnSpc>
+              <a:spcAft>
+                <a:spcPts val="0"/>
+              </a:spcAft>
+              <a:buNone/>
+            </a:pPr>
+            <a:r>
+              <a:rPr lang="en-US" sz="1200" b="0">
+                <a:solidFill>
+                  <a:srgbClr val="202b33"/>
+                </a:solidFill>
+                <a:latin typeface="Arial"/>
+                <a:ea typeface="Arial"/>
+                <a:cs typeface="Arial"/>
+              </a:rPr>
+              <a:t xml:space="preserve">Say the title line once, flat, then drop to the instruction. Leave the B/F example up during questions. Keep all eight terms in the notes; the screen closes on the instruction.</a:t>
             </a:r>
             <a:endParaRPr lang="en-US" sz="1200"/>
           </a:p>
@@ -3749,7 +3749,7 @@
                 <a:ea typeface="Arial"/>
                 <a:cs typeface="Arial"/>
               </a:rPr>
-              <a:t xml:space="preserve">Karen Sparck Jones · term specificity</a:t>
+              <a:t xml:space="preserve">Karen Spärck Jones · term specificity</a:t>
             </a:r>
             <a:endParaRPr lang="en-US" sz="1200"/>
           </a:p>
@@ -3841,7 +3841,7 @@
                 <a:ea typeface="Arial"/>
                 <a:cs typeface="Arial"/>
               </a:rPr>
-              <a:t xml:space="preserve">Karen Sparck Jones published a statistical interpretation of term specificity in 1972. A word that appears in almost every document tells you less about which document you want than a rare term does.</a:t>
+              <a:t xml:space="preserve">Karen Spärck Jones published a statistical interpretation of term specificity in 1972. A word that appears in almost every document tells you less about which document you want than a rare term does.</a:t>
             </a:r>
             <a:endParaRPr lang="en-US" sz="1200"/>
           </a:p>
@@ -3933,53 +3933,53 @@
                 <a:ea typeface="Arial"/>
                 <a:cs typeface="Arial"/>
               </a:rPr>
-              <a:t xml:space="preserve">Fifty-four years. We have had time to put her name on the slide. The point is not that every rare word is relevant. A typo can be rare. The point is that corpus frequency supplies evidence, and the evidence has a history and assumptions you can inspect.</a:t>
-            </a:r>
-            <a:endParaRPr lang="en-US" sz="1200"/>
-          </a:p>
-          <a:p>
-            <a:pPr marL="0" indent="0">
-              <a:lnSpc>
-                <a:spcPts val="1560"/>
-              </a:lnSpc>
-              <a:spcAft>
-                <a:spcPts val="0"/>
-              </a:spcAft>
-              <a:buNone/>
-            </a:pPr>
-            <a:r>
-              <a:rPr lang="en-US" sz="1200" b="0">
-                <a:solidFill>
-                  <a:srgbClr val="202b33"/>
-                </a:solidFill>
-                <a:latin typeface="Arial"/>
-                <a:ea typeface="Arial"/>
-                <a:cs typeface="Arial"/>
-              </a:rPr>
-              <a:t xml:space="preserve"/>
-            </a:r>
-            <a:endParaRPr lang="en-US" sz="1200"/>
-          </a:p>
-          <a:p>
-            <a:pPr marL="0" indent="0">
-              <a:lnSpc>
-                <a:spcPts val="1560"/>
-              </a:lnSpc>
-              <a:spcAft>
-                <a:spcPts val="0"/>
-              </a:spcAft>
-              <a:buNone/>
-            </a:pPr>
-            <a:r>
-              <a:rPr lang="en-US" sz="1200" b="0">
-                <a:solidFill>
-                  <a:srgbClr val="202b33"/>
-                </a:solidFill>
-                <a:latin typeface="Arial"/>
-                <a:ea typeface="Arial"/>
-                <a:cs typeface="Arial"/>
-              </a:rPr>
-              <a:t xml:space="preserve">Karen Sparck Jones (1972), A statistical interpretation of term specificity and its application in retrieval, Journal of Documentation 28(1), 11–21. [Author’s publication archive](https://www.cl.cam.ac.uk/archive/ksj21/ksjdigipapers/ksjbib3.html).</a:t>
+              <a:t xml:space="preserve">Fifty-four years. We have had time to put her name on the slide. The point is that corpus frequency supplies evidence, and the evidence has a history and assumptions you can inspect.</a:t>
+            </a:r>
+            <a:endParaRPr lang="en-US" sz="1200"/>
+          </a:p>
+          <a:p>
+            <a:pPr marL="0" indent="0">
+              <a:lnSpc>
+                <a:spcPts val="1560"/>
+              </a:lnSpc>
+              <a:spcAft>
+                <a:spcPts val="0"/>
+              </a:spcAft>
+              <a:buNone/>
+            </a:pPr>
+            <a:r>
+              <a:rPr lang="en-US" sz="1200" b="0">
+                <a:solidFill>
+                  <a:srgbClr val="202b33"/>
+                </a:solidFill>
+                <a:latin typeface="Arial"/>
+                <a:ea typeface="Arial"/>
+                <a:cs typeface="Arial"/>
+              </a:rPr>
+              <a:t xml:space="preserve"/>
+            </a:r>
+            <a:endParaRPr lang="en-US" sz="1200"/>
+          </a:p>
+          <a:p>
+            <a:pPr marL="0" indent="0">
+              <a:lnSpc>
+                <a:spcPts val="1560"/>
+              </a:lnSpc>
+              <a:spcAft>
+                <a:spcPts val="0"/>
+              </a:spcAft>
+              <a:buNone/>
+            </a:pPr>
+            <a:r>
+              <a:rPr lang="en-US" sz="1200" b="0">
+                <a:solidFill>
+                  <a:srgbClr val="202b33"/>
+                </a:solidFill>
+                <a:latin typeface="Arial"/>
+                <a:ea typeface="Arial"/>
+                <a:cs typeface="Arial"/>
+              </a:rPr>
+              <a:t xml:space="preserve">Karen Spärck Jones (1972), A statistical interpretation of term specificity and its application in retrieval, Journal of Documentation 28(1), 11–21. [Author’s publication archive](https://www.cl.cam.ac.uk/archive/ksj21/ksjdigipapers/ksjbib3.html).</a:t>
             </a:r>
             <a:endParaRPr lang="en-US" sz="1200"/>
           </a:p>
@@ -5422,7 +5422,7 @@
                 <a:ea typeface="Arial"/>
                 <a:cs typeface="Arial"/>
               </a:rPr>
-              <a:t xml:space="preserve">Passage retrieval was being studied before our chunk-size arguments acquired a token budget. Salton, Allan, and Buckley compared approaches in 1993.</a:t>
+              <a:t xml:space="preserve">Passage retrieval was being studied before our chunk-size arguments acquired a token budget. Salton, Allan, and Buckley compared approaches in 1993. Chunk size was an open research question in 1993 and a forum thread in 2024. One of those had a control group.</a:t>
             </a:r>
             <a:endParaRPr lang="en-US" sz="1200"/>
           </a:p>
@@ -6041,7 +6041,7 @@
                 <a:ea typeface="Arial"/>
                 <a:cs typeface="Arial"/>
               </a:rPr>
-              <a:t xml:space="preserve">Run the comparison on the same corpus, queries, and judgments. Otherwise you have compared two demonstrations and called the difference a model improvement.</a:t>
+              <a:t xml:space="preserve">Lexical, dense, hybrid. Those are the three search methods in the trenchcoat, and the pitch usually names one of them. Run the comparison on the same corpus, queries, and judgments. Otherwise you have compared two demonstrations and called the difference a model improvement.</a:t>
             </a:r>
             <a:endParaRPr lang="en-US" sz="1200"/>
           </a:p>
@@ -7983,7 +7983,7 @@
                 <a:ea typeface="Arial"/>
                 <a:cs typeface="Arial"/>
               </a:rPr>
-              <a:t xml:space="preserve">Demo: the hole in the golden set</a:t>
+              <a:t xml:space="preserve">Fool's Golden Dataset</a:t>
             </a:r>
             <a:endParaRPr lang="en-US" sz="3900"/>
           </a:p>
@@ -8954,7 +8954,7 @@
                 <a:ea typeface="Arial"/>
                 <a:cs typeface="Arial"/>
               </a:rPr>
-              <a:t xml:space="preserve">What changed: the next reader is a generator</a:t>
+              <a:t xml:space="preserve">The Reader Stopped Being a Person</a:t>
             </a:r>
             <a:endParaRPr lang="en-US" sz="3900"/>
           </a:p>
@@ -9902,7 +9902,7 @@
                 <a:ea typeface="Arial"/>
                 <a:cs typeface="Arial"/>
               </a:rPr>
-              <a:t xml:space="preserve">Three search methods in a fundable trenchcoat.</a:t>
+              <a:t xml:space="preserve">Three search methods. One instrument nobody checked.</a:t>
             </a:r>
             <a:endParaRPr lang="en-US" sz="3150"/>
           </a:p>
@@ -10752,7 +10752,7 @@
                 <a:ea typeface="Arial"/>
                 <a:cs typeface="Arial"/>
               </a:rPr>
-              <a:t xml:space="preserve">Karen Sparck Jones · term specificity</a:t>
+              <a:t xml:space="preserve">Karen Spärck Jones · term specificity</a:t>
             </a:r>
             <a:endParaRPr lang="en-US" sz="3150"/>
           </a:p>
@@ -11079,7 +11079,7 @@
                 <a:ea typeface="Arial"/>
                 <a:cs typeface="Arial"/>
               </a:rPr>
-              <a:t xml:space="preserve">1975 and 1990: the vector was already there</a:t>
+              <a:t xml:space="preserve">Vector Database, 1975</a:t>
             </a:r>
             <a:endParaRPr lang="en-US" sz="3900"/>
           </a:p>
@@ -13551,7 +13551,7 @@
       </p:sp>
       <p:pic>
         <p:nvPicPr>
-          <p:cNvPr id="5" name="3d65c12ae661fd9ad5ccfdb4af281d085e0dc1608a0306f237db7921c07bcdad" descr="Cranfield, Bedfordshire, 1966"/>
+          <p:cNvPr id="5" name="a6b4d212c36d475ddccc3e605d3fe5942640332d496970d4988bbc2917bbc042" descr="Cranfield, Bedfordshire, 1966"/>
           <p:cNvPicPr>
             <a:picLocks noChangeAspect="1"/>
           </p:cNvPicPr>
